--- a/decks/donna-appendix-v3.pptx
+++ b/decks/donna-appendix-v3.pptx
@@ -598,7 +598,7 @@
               <a:t>[TIMING] 90 sec.
 [SAY] On the free plan, keeping your conversations out of training is a setting you have to go find. On Claude for Work it is the default, in the contract. Everything below that row is the admin layer: the controls your IT and legal teams will ask about by name, and they only exist on the business plans.
 [DO] None. Let the column speak.
-[WATCH] Be precise if pressed: Pro and Max carry the same training toggle as free; the contractual exclusion and every admin control on this list is Claude for Work, and most are Enterprise. The free plan is not insecure, it is unmanaged. Say it that way.
+[WATCH] Be precise if pressed: Pro and Max carry the same training toggle as free; the contractual exclusion and every admin control on this list is Claude for Work, and most are Enterprise. SSO is Team and up; audit logs, retention, role permissions and the DPA are Enterprise (source: privacy.claude.com). The free plan is not insecure, it is unmanaged. Say it that way.
 [NEXT] That is the decision. Pick the plan, and we start building.</a:t>
             </a:r>
             <a:endParaRPr lang="en-US" dirty="0"/>
@@ -1003,8 +1003,8 @@
         </p:nvSpPr>
         <p:spPr>
           <a:xfrm>
-            <a:off x="813816" y="5943600"/>
-            <a:ext cx="2078736" cy="182880"/>
+            <a:off x="813816" y="5907024"/>
+            <a:ext cx="3358896" cy="274320"/>
           </a:xfrm>
           <a:prstGeom prst="rect">
             <a:avLst/>
@@ -1020,7 +1020,7 @@
               <a:buNone/>
             </a:pPr>
             <a:r>
-              <a:rPr lang="en-US" sz="900" spc="120" kern="0" dirty="0">
+              <a:rPr lang="en-US" sz="1600" spc="120" kern="0" dirty="0">
                 <a:solidFill>
                   <a:srgbClr val="5A6379"/>
                 </a:solidFill>
@@ -1030,7 +1030,7 @@
               </a:rPr>
               <a:t>BUILD YOUR OWN DONNA</a:t>
             </a:r>
-            <a:endParaRPr lang="en-US" sz="900" dirty="0"/>
+            <a:endParaRPr lang="en-US" sz="1600" dirty="0"/>
           </a:p>
         </p:txBody>
       </p:sp>
@@ -1042,7 +1042,7 @@
         </p:nvSpPr>
         <p:spPr>
           <a:xfrm rot="2700000">
-            <a:off x="2947416" y="6003036"/>
+            <a:off x="4227576" y="6012180"/>
             <a:ext cx="64008" cy="64008"/>
           </a:xfrm>
           <a:prstGeom prst="rect">
@@ -1067,8 +1067,8 @@
         </p:nvSpPr>
         <p:spPr>
           <a:xfrm>
-            <a:off x="3130296" y="5943600"/>
-            <a:ext cx="1688592" cy="182880"/>
+            <a:off x="4410456" y="5907024"/>
+            <a:ext cx="2712720" cy="274320"/>
           </a:xfrm>
           <a:prstGeom prst="rect">
             <a:avLst/>
@@ -1084,7 +1084,7 @@
               <a:buNone/>
             </a:pPr>
             <a:r>
-              <a:rPr lang="en-US" sz="900" spc="120" kern="0" dirty="0">
+              <a:rPr lang="en-US" sz="1600" spc="120" kern="0" dirty="0">
                 <a:solidFill>
                   <a:srgbClr val="5A6379"/>
                 </a:solidFill>
@@ -1094,7 +1094,7 @@
               </a:rPr>
               <a:t>OCTOBER 21, 2026</a:t>
             </a:r>
-            <a:endParaRPr lang="en-US" sz="900" dirty="0"/>
+            <a:endParaRPr lang="en-US" sz="1600" dirty="0"/>
           </a:p>
         </p:txBody>
       </p:sp>
@@ -1106,8 +1106,8 @@
         </p:nvSpPr>
         <p:spPr>
           <a:xfrm>
-            <a:off x="10652760" y="5943600"/>
-            <a:ext cx="731520" cy="182880"/>
+            <a:off x="10652760" y="5907024"/>
+            <a:ext cx="731520" cy="274320"/>
           </a:xfrm>
           <a:prstGeom prst="rect">
             <a:avLst/>
@@ -1123,7 +1123,7 @@
               <a:buNone/>
             </a:pPr>
             <a:r>
-              <a:rPr lang="en-US" sz="900" spc="120" kern="0" dirty="0">
+              <a:rPr lang="en-US" sz="1600" spc="120" kern="0" dirty="0">
                 <a:solidFill>
                   <a:srgbClr val="5A6379"/>
                 </a:solidFill>
@@ -1133,7 +1133,7 @@
               </a:rPr>
               <a:t>1</a:t>
             </a:r>
-            <a:endParaRPr lang="en-US" sz="900" dirty="0"/>
+            <a:endParaRPr lang="en-US" sz="1600" dirty="0"/>
           </a:p>
         </p:txBody>
       </p:sp>
@@ -1145,8 +1145,8 @@
         </p:nvSpPr>
         <p:spPr>
           <a:xfrm>
-            <a:off x="813816" y="502920"/>
-            <a:ext cx="10570464" cy="256032"/>
+            <a:off x="813816" y="457200"/>
+            <a:ext cx="10570464" cy="310896"/>
           </a:xfrm>
           <a:prstGeom prst="rect">
             <a:avLst/>
@@ -1162,7 +1162,7 @@
               <a:buNone/>
             </a:pPr>
             <a:r>
-              <a:rPr lang="en-US" sz="1200" b="1" spc="220" kern="0" dirty="0">
+              <a:rPr lang="en-US" sz="1600" b="1" spc="180" kern="0" dirty="0">
                 <a:solidFill>
                   <a:srgbClr val="8A6D14"/>
                 </a:solidFill>
@@ -1172,7 +1172,7 @@
               </a:rPr>
               <a:t>BUILD YOUR OWN DONNA · LEARNING OUTCOMES</a:t>
             </a:r>
-            <a:endParaRPr lang="en-US" sz="1200" dirty="0"/>
+            <a:endParaRPr lang="en-US" sz="1600" dirty="0"/>
           </a:p>
         </p:txBody>
       </p:sp>
@@ -1226,12 +1226,12 @@
         </p:nvSpPr>
         <p:spPr>
           <a:xfrm>
-            <a:off x="6469380" y="1591056"/>
-            <a:ext cx="1531620" cy="3602736"/>
+            <a:off x="7223760" y="1591056"/>
+            <a:ext cx="1280160" cy="3474720"/>
           </a:xfrm>
           <a:prstGeom prst="roundRect">
             <a:avLst>
-              <a:gd name="adj" fmla="val 4776"/>
+              <a:gd name="adj" fmla="val 5714"/>
             </a:avLst>
           </a:prstGeom>
           <a:solidFill>
@@ -1248,8 +1248,8 @@
         </p:nvSpPr>
         <p:spPr>
           <a:xfrm>
-            <a:off x="4791456" y="1664208"/>
-            <a:ext cx="1568196" cy="566928"/>
+            <a:off x="5797296" y="1664208"/>
+            <a:ext cx="1316736" cy="713232"/>
           </a:xfrm>
           <a:prstGeom prst="rect">
             <a:avLst/>
@@ -1268,7 +1268,7 @@
               <a:buNone/>
             </a:pPr>
             <a:r>
-              <a:rPr lang="en-US" sz="1050" b="1" spc="100" kern="0" dirty="0">
+              <a:rPr lang="en-US" sz="1600" b="1" spc="80" kern="0" dirty="0">
                 <a:solidFill>
                   <a:srgbClr val="14213D"/>
                 </a:solidFill>
@@ -1278,7 +1278,7 @@
               </a:rPr>
               <a:t>CLAUDE</a:t>
             </a:r>
-            <a:endParaRPr lang="en-US" sz="1050" dirty="0"/>
+            <a:endParaRPr lang="en-US" sz="1600" dirty="0"/>
           </a:p>
           <a:p>
             <a:pPr algn="ctr" indent="0" marL="0">
@@ -1288,7 +1288,7 @@
               <a:buNone/>
             </a:pPr>
             <a:r>
-              <a:rPr lang="en-US" sz="1050" b="1" spc="100" kern="0" dirty="0">
+              <a:rPr lang="en-US" sz="1600" b="1" spc="80" kern="0" dirty="0">
                 <a:solidFill>
                   <a:srgbClr val="14213D"/>
                 </a:solidFill>
@@ -1298,7 +1298,7 @@
               </a:rPr>
               <a:t>FREE</a:t>
             </a:r>
-            <a:endParaRPr lang="en-US" sz="1050" dirty="0"/>
+            <a:endParaRPr lang="en-US" sz="1600" dirty="0"/>
           </a:p>
         </p:txBody>
       </p:sp>
@@ -1310,8 +1310,8 @@
         </p:nvSpPr>
         <p:spPr>
           <a:xfrm>
-            <a:off x="6451092" y="1664208"/>
-            <a:ext cx="1568196" cy="566928"/>
+            <a:off x="7205472" y="1664208"/>
+            <a:ext cx="1316736" cy="713232"/>
           </a:xfrm>
           <a:prstGeom prst="rect">
             <a:avLst/>
@@ -1330,7 +1330,7 @@
               <a:buNone/>
             </a:pPr>
             <a:r>
-              <a:rPr lang="en-US" sz="1050" b="1" spc="100" kern="0" dirty="0">
+              <a:rPr lang="en-US" sz="1600" b="1" spc="80" kern="0" dirty="0">
                 <a:solidFill>
                   <a:srgbClr val="E7C766"/>
                 </a:solidFill>
@@ -1338,9 +1338,9 @@
                 <a:ea typeface="Arial" pitchFamily="34" charset="-122"/>
                 <a:cs typeface="Arial" pitchFamily="34" charset="-120"/>
               </a:rPr>
-              <a:t>CLAUDE PRO,</a:t>
-            </a:r>
-            <a:endParaRPr lang="en-US" sz="1050" dirty="0"/>
+              <a:t>CLAUDE</a:t>
+            </a:r>
+            <a:endParaRPr lang="en-US" sz="1600" dirty="0"/>
           </a:p>
           <a:p>
             <a:pPr algn="ctr" indent="0" marL="0">
@@ -1350,7 +1350,7 @@
               <a:buNone/>
             </a:pPr>
             <a:r>
-              <a:rPr lang="en-US" sz="1050" b="1" spc="100" kern="0" dirty="0">
+              <a:rPr lang="en-US" sz="1600" b="1" spc="80" kern="0" dirty="0">
                 <a:solidFill>
                   <a:srgbClr val="E7C766"/>
                 </a:solidFill>
@@ -1358,9 +1358,9 @@
                 <a:ea typeface="Arial" pitchFamily="34" charset="-122"/>
                 <a:cs typeface="Arial" pitchFamily="34" charset="-120"/>
               </a:rPr>
-              <a:t>MAX &amp; ENTERPRISE</a:t>
-            </a:r>
-            <a:endParaRPr lang="en-US" sz="1050" dirty="0"/>
+              <a:t>PAID</a:t>
+            </a:r>
+            <a:endParaRPr lang="en-US" sz="1600" dirty="0"/>
           </a:p>
         </p:txBody>
       </p:sp>
@@ -1372,8 +1372,8 @@
         </p:nvSpPr>
         <p:spPr>
           <a:xfrm>
-            <a:off x="8110728" y="1664208"/>
-            <a:ext cx="1568196" cy="566928"/>
+            <a:off x="8613648" y="1664208"/>
+            <a:ext cx="1316736" cy="713232"/>
           </a:xfrm>
           <a:prstGeom prst="rect">
             <a:avLst/>
@@ -1392,7 +1392,7 @@
               <a:buNone/>
             </a:pPr>
             <a:r>
-              <a:rPr lang="en-US" sz="1050" b="1" spc="100" kern="0" dirty="0">
+              <a:rPr lang="en-US" sz="1600" b="1" spc="80" kern="0" dirty="0">
                 <a:solidFill>
                   <a:srgbClr val="14213D"/>
                 </a:solidFill>
@@ -1402,7 +1402,7 @@
               </a:rPr>
               <a:t>CHATGPT</a:t>
             </a:r>
-            <a:endParaRPr lang="en-US" sz="1050" dirty="0"/>
+            <a:endParaRPr lang="en-US" sz="1600" dirty="0"/>
           </a:p>
         </p:txBody>
       </p:sp>
@@ -1414,8 +1414,8 @@
         </p:nvSpPr>
         <p:spPr>
           <a:xfrm>
-            <a:off x="9770364" y="1664208"/>
-            <a:ext cx="1568196" cy="566928"/>
+            <a:off x="10021824" y="1664208"/>
+            <a:ext cx="1316736" cy="713232"/>
           </a:xfrm>
           <a:prstGeom prst="rect">
             <a:avLst/>
@@ -1434,7 +1434,7 @@
               <a:buNone/>
             </a:pPr>
             <a:r>
-              <a:rPr lang="en-US" sz="1050" b="1" spc="100" kern="0" dirty="0">
+              <a:rPr lang="en-US" sz="1600" b="1" spc="80" kern="0" dirty="0">
                 <a:solidFill>
                   <a:srgbClr val="14213D"/>
                 </a:solidFill>
@@ -1442,29 +1442,9 @@
                 <a:ea typeface="Arial" pitchFamily="34" charset="-122"/>
                 <a:cs typeface="Arial" pitchFamily="34" charset="-120"/>
               </a:rPr>
-              <a:t>MICROSOFT</a:t>
-            </a:r>
-            <a:endParaRPr lang="en-US" sz="1050" dirty="0"/>
-          </a:p>
-          <a:p>
-            <a:pPr algn="ctr" indent="0" marL="0">
-              <a:lnSpc>
-                <a:spcPct val="105000"/>
-              </a:lnSpc>
-              <a:buNone/>
-            </a:pPr>
-            <a:r>
-              <a:rPr lang="en-US" sz="1050" b="1" spc="100" kern="0" dirty="0">
-                <a:solidFill>
-                  <a:srgbClr val="14213D"/>
-                </a:solidFill>
-                <a:latin typeface="Arial" pitchFamily="34" charset="0"/>
-                <a:ea typeface="Arial" pitchFamily="34" charset="-122"/>
-                <a:cs typeface="Arial" pitchFamily="34" charset="-120"/>
-              </a:rPr>
               <a:t>COPILOT</a:t>
             </a:r>
-            <a:endParaRPr lang="en-US" sz="1050" dirty="0"/>
+            <a:endParaRPr lang="en-US" sz="1600" dirty="0"/>
           </a:p>
         </p:txBody>
       </p:sp>
@@ -1476,8 +1456,8 @@
         </p:nvSpPr>
         <p:spPr>
           <a:xfrm>
-            <a:off x="704088" y="2286000"/>
-            <a:ext cx="3968496" cy="566928"/>
+            <a:off x="704088" y="2432304"/>
+            <a:ext cx="4974336" cy="512064"/>
           </a:xfrm>
           <a:prstGeom prst="rect">
             <a:avLst/>
@@ -1496,7 +1476,7 @@
         </p:nvSpPr>
         <p:spPr>
           <a:xfrm rot="2700000">
-            <a:off x="832104" y="2519172"/>
+            <a:off x="832104" y="2638044"/>
             <a:ext cx="100584" cy="100584"/>
           </a:xfrm>
           <a:prstGeom prst="rect">
@@ -1521,8 +1501,8 @@
         </p:nvSpPr>
         <p:spPr>
           <a:xfrm>
-            <a:off x="1124712" y="2286000"/>
-            <a:ext cx="3438144" cy="566928"/>
+            <a:off x="1124712" y="2432304"/>
+            <a:ext cx="4443984" cy="512064"/>
           </a:xfrm>
           <a:prstGeom prst="rect">
             <a:avLst/>
@@ -1541,7 +1521,7 @@
               <a:buNone/>
             </a:pPr>
             <a:r>
-              <a:rPr lang="en-US" sz="1400" dirty="0">
+              <a:rPr lang="en-US" sz="1600" dirty="0">
                 <a:solidFill>
                   <a:srgbClr val="14213D"/>
                 </a:solidFill>
@@ -1549,9 +1529,9 @@
                 <a:ea typeface="Arial" pitchFamily="34" charset="-122"/>
                 <a:cs typeface="Arial" pitchFamily="34" charset="-120"/>
               </a:rPr>
-              <a:t>AI terminology: chat, projects, context window, agents</a:t>
-            </a:r>
-            <a:endParaRPr lang="en-US" sz="1400" dirty="0"/>
+              <a:t>AI vocabulary: chat, projects, agents</a:t>
+            </a:r>
+            <a:endParaRPr lang="en-US" sz="1600" dirty="0"/>
           </a:p>
         </p:txBody>
       </p:sp>
@@ -1563,8 +1543,8 @@
         </p:nvSpPr>
         <p:spPr>
           <a:xfrm>
-            <a:off x="4791456" y="2286000"/>
-            <a:ext cx="1568196" cy="566928"/>
+            <a:off x="5797296" y="2432304"/>
+            <a:ext cx="1316736" cy="512064"/>
           </a:xfrm>
           <a:prstGeom prst="rect">
             <a:avLst/>
@@ -1602,8 +1582,8 @@
         </p:nvSpPr>
         <p:spPr>
           <a:xfrm>
-            <a:off x="6451092" y="2286000"/>
-            <a:ext cx="1568196" cy="566928"/>
+            <a:off x="7205472" y="2432304"/>
+            <a:ext cx="1316736" cy="512064"/>
           </a:xfrm>
           <a:prstGeom prst="rect">
             <a:avLst/>
@@ -1641,8 +1621,8 @@
         </p:nvSpPr>
         <p:spPr>
           <a:xfrm>
-            <a:off x="8110728" y="2286000"/>
-            <a:ext cx="1568196" cy="566928"/>
+            <a:off x="8613648" y="2432304"/>
+            <a:ext cx="1316736" cy="512064"/>
           </a:xfrm>
           <a:prstGeom prst="rect">
             <a:avLst/>
@@ -1680,8 +1660,8 @@
         </p:nvSpPr>
         <p:spPr>
           <a:xfrm>
-            <a:off x="9770364" y="2286000"/>
-            <a:ext cx="1568196" cy="566928"/>
+            <a:off x="10021824" y="2432304"/>
+            <a:ext cx="1316736" cy="512064"/>
           </a:xfrm>
           <a:prstGeom prst="rect">
             <a:avLst/>
@@ -1719,7 +1699,7 @@
         </p:nvSpPr>
         <p:spPr>
           <a:xfrm rot="2700000">
-            <a:off x="832104" y="3086100"/>
+            <a:off x="832104" y="3150108"/>
             <a:ext cx="100584" cy="100584"/>
           </a:xfrm>
           <a:prstGeom prst="rect">
@@ -1744,8 +1724,8 @@
         </p:nvSpPr>
         <p:spPr>
           <a:xfrm>
-            <a:off x="1124712" y="2852928"/>
-            <a:ext cx="3438144" cy="566928"/>
+            <a:off x="1124712" y="2944368"/>
+            <a:ext cx="4443984" cy="512064"/>
           </a:xfrm>
           <a:prstGeom prst="rect">
             <a:avLst/>
@@ -1764,7 +1744,7 @@
               <a:buNone/>
             </a:pPr>
             <a:r>
-              <a:rPr lang="en-US" sz="1400" dirty="0">
+              <a:rPr lang="en-US" sz="1600" dirty="0">
                 <a:solidFill>
                   <a:srgbClr val="14213D"/>
                 </a:solidFill>
@@ -1774,7 +1754,7 @@
               </a:rPr>
               <a:t>Connect an agent to your email</a:t>
             </a:r>
-            <a:endParaRPr lang="en-US" sz="1400" dirty="0"/>
+            <a:endParaRPr lang="en-US" sz="1600" dirty="0"/>
           </a:p>
         </p:txBody>
       </p:sp>
@@ -1786,8 +1766,8 @@
         </p:nvSpPr>
         <p:spPr>
           <a:xfrm>
-            <a:off x="4791456" y="2852928"/>
-            <a:ext cx="1568196" cy="566928"/>
+            <a:off x="5797296" y="2944368"/>
+            <a:ext cx="1316736" cy="512064"/>
           </a:xfrm>
           <a:prstGeom prst="rect">
             <a:avLst/>
@@ -1825,8 +1805,8 @@
         </p:nvSpPr>
         <p:spPr>
           <a:xfrm>
-            <a:off x="6451092" y="2852928"/>
-            <a:ext cx="1568196" cy="566928"/>
+            <a:off x="7205472" y="2944368"/>
+            <a:ext cx="1316736" cy="512064"/>
           </a:xfrm>
           <a:prstGeom prst="rect">
             <a:avLst/>
@@ -1864,8 +1844,8 @@
         </p:nvSpPr>
         <p:spPr>
           <a:xfrm>
-            <a:off x="8110728" y="2852928"/>
-            <a:ext cx="1568196" cy="566928"/>
+            <a:off x="8613648" y="2944368"/>
+            <a:ext cx="1316736" cy="512064"/>
           </a:xfrm>
           <a:prstGeom prst="rect">
             <a:avLst/>
@@ -1903,8 +1883,8 @@
         </p:nvSpPr>
         <p:spPr>
           <a:xfrm>
-            <a:off x="9770364" y="2852928"/>
-            <a:ext cx="1568196" cy="566928"/>
+            <a:off x="10021824" y="2944368"/>
+            <a:ext cx="1316736" cy="512064"/>
           </a:xfrm>
           <a:prstGeom prst="rect">
             <a:avLst/>
@@ -1942,8 +1922,8 @@
         </p:nvSpPr>
         <p:spPr>
           <a:xfrm>
-            <a:off x="704088" y="3419856"/>
-            <a:ext cx="3968496" cy="566928"/>
+            <a:off x="704088" y="3456432"/>
+            <a:ext cx="4974336" cy="512064"/>
           </a:xfrm>
           <a:prstGeom prst="rect">
             <a:avLst/>
@@ -1962,7 +1942,7 @@
         </p:nvSpPr>
         <p:spPr>
           <a:xfrm rot="2700000">
-            <a:off x="832104" y="3653028"/>
+            <a:off x="832104" y="3662172"/>
             <a:ext cx="100584" cy="100584"/>
           </a:xfrm>
           <a:prstGeom prst="rect">
@@ -1987,8 +1967,8 @@
         </p:nvSpPr>
         <p:spPr>
           <a:xfrm>
-            <a:off x="1124712" y="3419856"/>
-            <a:ext cx="3438144" cy="566928"/>
+            <a:off x="1124712" y="3456432"/>
+            <a:ext cx="4443984" cy="512064"/>
           </a:xfrm>
           <a:prstGeom prst="rect">
             <a:avLst/>
@@ -2007,7 +1987,7 @@
               <a:buNone/>
             </a:pPr>
             <a:r>
-              <a:rPr lang="en-US" sz="1400" dirty="0">
+              <a:rPr lang="en-US" sz="1600" dirty="0">
                 <a:solidFill>
                   <a:srgbClr val="14213D"/>
                 </a:solidFill>
@@ -2017,7 +1997,7 @@
               </a:rPr>
               <a:t>Build a personalized agent</a:t>
             </a:r>
-            <a:endParaRPr lang="en-US" sz="1400" dirty="0"/>
+            <a:endParaRPr lang="en-US" sz="1600" dirty="0"/>
           </a:p>
         </p:txBody>
       </p:sp>
@@ -2029,8 +2009,8 @@
         </p:nvSpPr>
         <p:spPr>
           <a:xfrm>
-            <a:off x="4791456" y="3419856"/>
-            <a:ext cx="1568196" cy="566928"/>
+            <a:off x="5797296" y="3456432"/>
+            <a:ext cx="1316736" cy="512064"/>
           </a:xfrm>
           <a:prstGeom prst="rect">
             <a:avLst/>
@@ -2068,8 +2048,8 @@
         </p:nvSpPr>
         <p:spPr>
           <a:xfrm>
-            <a:off x="6451092" y="3419856"/>
-            <a:ext cx="1568196" cy="566928"/>
+            <a:off x="7205472" y="3456432"/>
+            <a:ext cx="1316736" cy="512064"/>
           </a:xfrm>
           <a:prstGeom prst="rect">
             <a:avLst/>
@@ -2107,8 +2087,8 @@
         </p:nvSpPr>
         <p:spPr>
           <a:xfrm>
-            <a:off x="8110728" y="3419856"/>
-            <a:ext cx="1568196" cy="566928"/>
+            <a:off x="8613648" y="3456432"/>
+            <a:ext cx="1316736" cy="512064"/>
           </a:xfrm>
           <a:prstGeom prst="rect">
             <a:avLst/>
@@ -2146,8 +2126,8 @@
         </p:nvSpPr>
         <p:spPr>
           <a:xfrm>
-            <a:off x="9770364" y="3419856"/>
-            <a:ext cx="1568196" cy="566928"/>
+            <a:off x="10021824" y="3456432"/>
+            <a:ext cx="1316736" cy="512064"/>
           </a:xfrm>
           <a:prstGeom prst="rect">
             <a:avLst/>
@@ -2185,7 +2165,7 @@
         </p:nvSpPr>
         <p:spPr>
           <a:xfrm rot="2700000">
-            <a:off x="832104" y="4219956"/>
+            <a:off x="832104" y="4174236"/>
             <a:ext cx="100584" cy="100584"/>
           </a:xfrm>
           <a:prstGeom prst="rect">
@@ -2210,8 +2190,8 @@
         </p:nvSpPr>
         <p:spPr>
           <a:xfrm>
-            <a:off x="1124712" y="3986784"/>
-            <a:ext cx="3438144" cy="566928"/>
+            <a:off x="1124712" y="3968496"/>
+            <a:ext cx="4443984" cy="512064"/>
           </a:xfrm>
           <a:prstGeom prst="rect">
             <a:avLst/>
@@ -2230,7 +2210,7 @@
               <a:buNone/>
             </a:pPr>
             <a:r>
-              <a:rPr lang="en-US" sz="1400" dirty="0">
+              <a:rPr lang="en-US" sz="1600" dirty="0">
                 <a:solidFill>
                   <a:srgbClr val="14213D"/>
                 </a:solidFill>
@@ -2240,7 +2220,7 @@
               </a:rPr>
               <a:t>A portable agent you own</a:t>
             </a:r>
-            <a:endParaRPr lang="en-US" sz="1400" dirty="0"/>
+            <a:endParaRPr lang="en-US" sz="1600" dirty="0"/>
           </a:p>
         </p:txBody>
       </p:sp>
@@ -2252,8 +2232,8 @@
         </p:nvSpPr>
         <p:spPr>
           <a:xfrm>
-            <a:off x="4791456" y="3986784"/>
-            <a:ext cx="1568196" cy="566928"/>
+            <a:off x="5797296" y="3968496"/>
+            <a:ext cx="1316736" cy="512064"/>
           </a:xfrm>
           <a:prstGeom prst="rect">
             <a:avLst/>
@@ -2291,8 +2271,8 @@
         </p:nvSpPr>
         <p:spPr>
           <a:xfrm>
-            <a:off x="6451092" y="3986784"/>
-            <a:ext cx="1568196" cy="566928"/>
+            <a:off x="7205472" y="3968496"/>
+            <a:ext cx="1316736" cy="512064"/>
           </a:xfrm>
           <a:prstGeom prst="rect">
             <a:avLst/>
@@ -2330,8 +2310,8 @@
         </p:nvSpPr>
         <p:spPr>
           <a:xfrm>
-            <a:off x="8110728" y="3986784"/>
-            <a:ext cx="1568196" cy="566928"/>
+            <a:off x="8613648" y="3968496"/>
+            <a:ext cx="1316736" cy="512064"/>
           </a:xfrm>
           <a:prstGeom prst="rect">
             <a:avLst/>
@@ -2369,8 +2349,8 @@
         </p:nvSpPr>
         <p:spPr>
           <a:xfrm>
-            <a:off x="9770364" y="3986784"/>
-            <a:ext cx="1568196" cy="566928"/>
+            <a:off x="10021824" y="3968496"/>
+            <a:ext cx="1316736" cy="512064"/>
           </a:xfrm>
           <a:prstGeom prst="rect">
             <a:avLst/>
@@ -2408,8 +2388,8 @@
         </p:nvSpPr>
         <p:spPr>
           <a:xfrm>
-            <a:off x="704088" y="4553712"/>
-            <a:ext cx="3968496" cy="566928"/>
+            <a:off x="704088" y="4480560"/>
+            <a:ext cx="4974336" cy="512064"/>
           </a:xfrm>
           <a:prstGeom prst="rect">
             <a:avLst/>
@@ -2428,7 +2408,7 @@
         </p:nvSpPr>
         <p:spPr>
           <a:xfrm rot="2700000">
-            <a:off x="832104" y="4786884"/>
+            <a:off x="832104" y="4686300"/>
             <a:ext cx="100584" cy="100584"/>
           </a:xfrm>
           <a:prstGeom prst="rect">
@@ -2453,8 +2433,8 @@
         </p:nvSpPr>
         <p:spPr>
           <a:xfrm>
-            <a:off x="1124712" y="4553712"/>
-            <a:ext cx="3438144" cy="566928"/>
+            <a:off x="1124712" y="4480560"/>
+            <a:ext cx="4443984" cy="512064"/>
           </a:xfrm>
           <a:prstGeom prst="rect">
             <a:avLst/>
@@ -2473,7 +2453,7 @@
               <a:buNone/>
             </a:pPr>
             <a:r>
-              <a:rPr lang="en-US" sz="1400" dirty="0">
+              <a:rPr lang="en-US" sz="1600" dirty="0">
                 <a:solidFill>
                   <a:srgbClr val="14213D"/>
                 </a:solidFill>
@@ -2481,9 +2461,9 @@
                 <a:ea typeface="Arial" pitchFamily="34" charset="-122"/>
                 <a:cs typeface="Arial" pitchFamily="34" charset="-120"/>
               </a:rPr>
-              <a:t>Leave with a scheduled agent, running on its own</a:t>
-            </a:r>
-            <a:endParaRPr lang="en-US" sz="1400" dirty="0"/>
+              <a:t>A scheduled agent, running on its own</a:t>
+            </a:r>
+            <a:endParaRPr lang="en-US" sz="1600" dirty="0"/>
           </a:p>
         </p:txBody>
       </p:sp>
@@ -2495,8 +2475,8 @@
         </p:nvSpPr>
         <p:spPr>
           <a:xfrm>
-            <a:off x="4791456" y="4553712"/>
-            <a:ext cx="1568196" cy="566928"/>
+            <a:off x="5797296" y="4480560"/>
+            <a:ext cx="1316736" cy="512064"/>
           </a:xfrm>
           <a:prstGeom prst="rect">
             <a:avLst/>
@@ -2512,7 +2492,7 @@
               <a:buNone/>
             </a:pPr>
             <a:r>
-              <a:rPr lang="en-US" sz="1500" b="1" dirty="0">
+              <a:rPr lang="en-US" sz="1800" b="1" dirty="0">
                 <a:solidFill>
                   <a:srgbClr val="5A6379"/>
                 </a:solidFill>
@@ -2522,7 +2502,7 @@
               </a:rPr>
               <a:t>✕</a:t>
             </a:r>
-            <a:endParaRPr lang="en-US" sz="1500" dirty="0"/>
+            <a:endParaRPr lang="en-US" sz="1800" dirty="0"/>
           </a:p>
         </p:txBody>
       </p:sp>
@@ -2534,8 +2514,8 @@
         </p:nvSpPr>
         <p:spPr>
           <a:xfrm>
-            <a:off x="6451092" y="4553712"/>
-            <a:ext cx="1568196" cy="566928"/>
+            <a:off x="7205472" y="4480560"/>
+            <a:ext cx="1316736" cy="512064"/>
           </a:xfrm>
           <a:prstGeom prst="rect">
             <a:avLst/>
@@ -2573,8 +2553,8 @@
         </p:nvSpPr>
         <p:spPr>
           <a:xfrm>
-            <a:off x="8110728" y="4553712"/>
-            <a:ext cx="1568196" cy="566928"/>
+            <a:off x="8613648" y="4480560"/>
+            <a:ext cx="1316736" cy="512064"/>
           </a:xfrm>
           <a:prstGeom prst="rect">
             <a:avLst/>
@@ -2590,7 +2570,7 @@
               <a:buNone/>
             </a:pPr>
             <a:r>
-              <a:rPr lang="en-US" sz="1500" b="1" dirty="0">
+              <a:rPr lang="en-US" sz="1800" b="1" dirty="0">
                 <a:solidFill>
                   <a:srgbClr val="5A6379"/>
                 </a:solidFill>
@@ -2600,7 +2580,7 @@
               </a:rPr>
               <a:t>✕</a:t>
             </a:r>
-            <a:endParaRPr lang="en-US" sz="1500" dirty="0"/>
+            <a:endParaRPr lang="en-US" sz="1800" dirty="0"/>
           </a:p>
         </p:txBody>
       </p:sp>
@@ -2612,8 +2592,8 @@
         </p:nvSpPr>
         <p:spPr>
           <a:xfrm>
-            <a:off x="9770364" y="4553712"/>
-            <a:ext cx="1568196" cy="566928"/>
+            <a:off x="10021824" y="4480560"/>
+            <a:ext cx="1316736" cy="512064"/>
           </a:xfrm>
           <a:prstGeom prst="rect">
             <a:avLst/>
@@ -2629,7 +2609,7 @@
               <a:buNone/>
             </a:pPr>
             <a:r>
-              <a:rPr lang="en-US" sz="1500" b="1" dirty="0">
+              <a:rPr lang="en-US" sz="1800" b="1" dirty="0">
                 <a:solidFill>
                   <a:srgbClr val="5A6379"/>
                 </a:solidFill>
@@ -2639,7 +2619,7 @@
               </a:rPr>
               <a:t>✕</a:t>
             </a:r>
-            <a:endParaRPr lang="en-US" sz="1500" dirty="0"/>
+            <a:endParaRPr lang="en-US" sz="1800" dirty="0"/>
           </a:p>
         </p:txBody>
       </p:sp>
@@ -2651,8 +2631,8 @@
         </p:nvSpPr>
         <p:spPr>
           <a:xfrm>
-            <a:off x="813816" y="5303520"/>
-            <a:ext cx="10570464" cy="299466"/>
+            <a:off x="813816" y="5138928"/>
+            <a:ext cx="10570464" cy="347472"/>
           </a:xfrm>
           <a:prstGeom prst="rect">
             <a:avLst/>
@@ -2671,7 +2651,7 @@
               <a:buNone/>
             </a:pPr>
             <a:r>
-              <a:rPr lang="en-US" sz="1300" b="1" dirty="0">
+              <a:rPr lang="en-US" sz="1600" b="1" dirty="0">
                 <a:solidFill>
                   <a:srgbClr val="8A6D14"/>
                 </a:solidFill>
@@ -2679,9 +2659,9 @@
                 <a:ea typeface="Arial" pitchFamily="34" charset="-122"/>
                 <a:cs typeface="Arial" pitchFamily="34" charset="-120"/>
               </a:rPr>
-              <a:t>Any platform covers the first four. Leaving with a scheduled agent running on its own takes a paid Claude plan.</a:t>
-            </a:r>
-            <a:endParaRPr lang="en-US" sz="1300" dirty="0"/>
+              <a:t>Any platform covers the first four. A scheduled agent takes a paid Claude plan.</a:t>
+            </a:r>
+            <a:endParaRPr lang="en-US" sz="1600" dirty="0"/>
           </a:p>
         </p:txBody>
       </p:sp>
@@ -2748,8 +2728,8 @@
         </p:nvSpPr>
         <p:spPr>
           <a:xfrm>
-            <a:off x="813816" y="5943600"/>
-            <a:ext cx="2078736" cy="182880"/>
+            <a:off x="813816" y="5907024"/>
+            <a:ext cx="3358896" cy="274320"/>
           </a:xfrm>
           <a:prstGeom prst="rect">
             <a:avLst/>
@@ -2765,7 +2745,7 @@
               <a:buNone/>
             </a:pPr>
             <a:r>
-              <a:rPr lang="en-US" sz="900" spc="120" kern="0" dirty="0">
+              <a:rPr lang="en-US" sz="1600" spc="120" kern="0" dirty="0">
                 <a:solidFill>
                   <a:srgbClr val="5A6379"/>
                 </a:solidFill>
@@ -2775,7 +2755,7 @@
               </a:rPr>
               <a:t>BUILD YOUR OWN DONNA</a:t>
             </a:r>
-            <a:endParaRPr lang="en-US" sz="900" dirty="0"/>
+            <a:endParaRPr lang="en-US" sz="1600" dirty="0"/>
           </a:p>
         </p:txBody>
       </p:sp>
@@ -2787,7 +2767,7 @@
         </p:nvSpPr>
         <p:spPr>
           <a:xfrm rot="2700000">
-            <a:off x="2947416" y="6003036"/>
+            <a:off x="4227576" y="6012180"/>
             <a:ext cx="64008" cy="64008"/>
           </a:xfrm>
           <a:prstGeom prst="rect">
@@ -2812,8 +2792,8 @@
         </p:nvSpPr>
         <p:spPr>
           <a:xfrm>
-            <a:off x="3130296" y="5943600"/>
-            <a:ext cx="1688592" cy="182880"/>
+            <a:off x="4410456" y="5907024"/>
+            <a:ext cx="2712720" cy="274320"/>
           </a:xfrm>
           <a:prstGeom prst="rect">
             <a:avLst/>
@@ -2829,7 +2809,7 @@
               <a:buNone/>
             </a:pPr>
             <a:r>
-              <a:rPr lang="en-US" sz="900" spc="120" kern="0" dirty="0">
+              <a:rPr lang="en-US" sz="1600" spc="120" kern="0" dirty="0">
                 <a:solidFill>
                   <a:srgbClr val="5A6379"/>
                 </a:solidFill>
@@ -2839,7 +2819,7 @@
               </a:rPr>
               <a:t>OCTOBER 21, 2026</a:t>
             </a:r>
-            <a:endParaRPr lang="en-US" sz="900" dirty="0"/>
+            <a:endParaRPr lang="en-US" sz="1600" dirty="0"/>
           </a:p>
         </p:txBody>
       </p:sp>
@@ -2851,8 +2831,8 @@
         </p:nvSpPr>
         <p:spPr>
           <a:xfrm>
-            <a:off x="10652760" y="5943600"/>
-            <a:ext cx="731520" cy="182880"/>
+            <a:off x="10652760" y="5907024"/>
+            <a:ext cx="731520" cy="274320"/>
           </a:xfrm>
           <a:prstGeom prst="rect">
             <a:avLst/>
@@ -2868,7 +2848,7 @@
               <a:buNone/>
             </a:pPr>
             <a:r>
-              <a:rPr lang="en-US" sz="900" spc="120" kern="0" dirty="0">
+              <a:rPr lang="en-US" sz="1600" spc="120" kern="0" dirty="0">
                 <a:solidFill>
                   <a:srgbClr val="5A6379"/>
                 </a:solidFill>
@@ -2878,7 +2858,7 @@
               </a:rPr>
               <a:t>2</a:t>
             </a:r>
-            <a:endParaRPr lang="en-US" sz="900" dirty="0"/>
+            <a:endParaRPr lang="en-US" sz="1600" dirty="0"/>
           </a:p>
         </p:txBody>
       </p:sp>
@@ -2890,8 +2870,8 @@
         </p:nvSpPr>
         <p:spPr>
           <a:xfrm>
-            <a:off x="813816" y="502920"/>
-            <a:ext cx="10570464" cy="256032"/>
+            <a:off x="813816" y="457200"/>
+            <a:ext cx="10570464" cy="310896"/>
           </a:xfrm>
           <a:prstGeom prst="rect">
             <a:avLst/>
@@ -2907,7 +2887,7 @@
               <a:buNone/>
             </a:pPr>
             <a:r>
-              <a:rPr lang="en-US" sz="1200" b="1" spc="220" kern="0" dirty="0">
+              <a:rPr lang="en-US" sz="1600" b="1" spc="180" kern="0" dirty="0">
                 <a:solidFill>
                   <a:srgbClr val="8A6D14"/>
                 </a:solidFill>
@@ -2917,7 +2897,7 @@
               </a:rPr>
               <a:t>BUILD YOUR OWN DONNA · DATA SECURITY IN CLAUDE</a:t>
             </a:r>
-            <a:endParaRPr lang="en-US" sz="1200" dirty="0"/>
+            <a:endParaRPr lang="en-US" sz="1600" dirty="0"/>
           </a:p>
         </p:txBody>
       </p:sp>
@@ -2971,12 +2951,12 @@
         </p:nvSpPr>
         <p:spPr>
           <a:xfrm>
-            <a:off x="9409176" y="1591056"/>
-            <a:ext cx="1911096" cy="3621024"/>
+            <a:off x="9637776" y="1591056"/>
+            <a:ext cx="1682496" cy="3438144"/>
           </a:xfrm>
           <a:prstGeom prst="roundRect">
             <a:avLst>
-              <a:gd name="adj" fmla="val 3828"/>
+              <a:gd name="adj" fmla="val 4348"/>
             </a:avLst>
           </a:prstGeom>
           <a:solidFill>
@@ -2993,8 +2973,8 @@
         </p:nvSpPr>
         <p:spPr>
           <a:xfrm>
-            <a:off x="7351776" y="1664208"/>
-            <a:ext cx="1947672" cy="566928"/>
+            <a:off x="7808976" y="1664208"/>
+            <a:ext cx="1719072" cy="713232"/>
           </a:xfrm>
           <a:prstGeom prst="rect">
             <a:avLst/>
@@ -3013,7 +2993,7 @@
               <a:buNone/>
             </a:pPr>
             <a:r>
-              <a:rPr lang="en-US" sz="1050" b="1" spc="100" kern="0" dirty="0">
+              <a:rPr lang="en-US" sz="1600" b="1" spc="80" kern="0" dirty="0">
                 <a:solidFill>
                   <a:srgbClr val="14213D"/>
                 </a:solidFill>
@@ -3023,7 +3003,7 @@
               </a:rPr>
               <a:t>CLAUDE</a:t>
             </a:r>
-            <a:endParaRPr lang="en-US" sz="1050" dirty="0"/>
+            <a:endParaRPr lang="en-US" sz="1600" dirty="0"/>
           </a:p>
           <a:p>
             <a:pPr algn="ctr" indent="0" marL="0">
@@ -3033,7 +3013,7 @@
               <a:buNone/>
             </a:pPr>
             <a:r>
-              <a:rPr lang="en-US" sz="1050" b="1" spc="100" kern="0" dirty="0">
+              <a:rPr lang="en-US" sz="1600" b="1" spc="80" kern="0" dirty="0">
                 <a:solidFill>
                   <a:srgbClr val="14213D"/>
                 </a:solidFill>
@@ -3043,7 +3023,7 @@
               </a:rPr>
               <a:t>FREE</a:t>
             </a:r>
-            <a:endParaRPr lang="en-US" sz="1050" dirty="0"/>
+            <a:endParaRPr lang="en-US" sz="1600" dirty="0"/>
           </a:p>
         </p:txBody>
       </p:sp>
@@ -3055,8 +3035,8 @@
         </p:nvSpPr>
         <p:spPr>
           <a:xfrm>
-            <a:off x="9390888" y="1664208"/>
-            <a:ext cx="1947672" cy="566928"/>
+            <a:off x="9619488" y="1664208"/>
+            <a:ext cx="1719072" cy="713232"/>
           </a:xfrm>
           <a:prstGeom prst="rect">
             <a:avLst/>
@@ -3075,7 +3055,7 @@
               <a:buNone/>
             </a:pPr>
             <a:r>
-              <a:rPr lang="en-US" sz="1050" b="1" spc="100" kern="0" dirty="0">
+              <a:rPr lang="en-US" sz="1600" b="1" spc="80" kern="0" dirty="0">
                 <a:solidFill>
                   <a:srgbClr val="E7C766"/>
                 </a:solidFill>
@@ -3083,9 +3063,9 @@
                 <a:ea typeface="Arial" pitchFamily="34" charset="-122"/>
                 <a:cs typeface="Arial" pitchFamily="34" charset="-120"/>
               </a:rPr>
-              <a:t>CLAUDE PRO,</a:t>
-            </a:r>
-            <a:endParaRPr lang="en-US" sz="1050" dirty="0"/>
+              <a:t>CLAUDE</a:t>
+            </a:r>
+            <a:endParaRPr lang="en-US" sz="1600" dirty="0"/>
           </a:p>
           <a:p>
             <a:pPr algn="ctr" indent="0" marL="0">
@@ -3095,7 +3075,7 @@
               <a:buNone/>
             </a:pPr>
             <a:r>
-              <a:rPr lang="en-US" sz="1050" b="1" spc="100" kern="0" dirty="0">
+              <a:rPr lang="en-US" sz="1600" b="1" spc="80" kern="0" dirty="0">
                 <a:solidFill>
                   <a:srgbClr val="E7C766"/>
                 </a:solidFill>
@@ -3103,9 +3083,9 @@
                 <a:ea typeface="Arial" pitchFamily="34" charset="-122"/>
                 <a:cs typeface="Arial" pitchFamily="34" charset="-120"/>
               </a:rPr>
-              <a:t>MAX &amp; ENTERPRISE</a:t>
-            </a:r>
-            <a:endParaRPr lang="en-US" sz="1050" dirty="0"/>
+              <a:t>PAID</a:t>
+            </a:r>
+            <a:endParaRPr lang="en-US" sz="1600" dirty="0"/>
           </a:p>
         </p:txBody>
       </p:sp>
@@ -3117,8 +3097,8 @@
         </p:nvSpPr>
         <p:spPr>
           <a:xfrm>
-            <a:off x="704088" y="2286000"/>
-            <a:ext cx="6528816" cy="475488"/>
+            <a:off x="704088" y="2432304"/>
+            <a:ext cx="6986016" cy="420624"/>
           </a:xfrm>
           <a:prstGeom prst="rect">
             <a:avLst/>
@@ -3137,7 +3117,7 @@
         </p:nvSpPr>
         <p:spPr>
           <a:xfrm rot="2700000">
-            <a:off x="832104" y="2473452"/>
+            <a:off x="832104" y="2592324"/>
             <a:ext cx="100584" cy="100584"/>
           </a:xfrm>
           <a:prstGeom prst="rect">
@@ -3162,8 +3142,8 @@
         </p:nvSpPr>
         <p:spPr>
           <a:xfrm>
-            <a:off x="1124712" y="2286000"/>
-            <a:ext cx="5998464" cy="475488"/>
+            <a:off x="1124712" y="2432304"/>
+            <a:ext cx="6455664" cy="420624"/>
           </a:xfrm>
           <a:prstGeom prst="rect">
             <a:avLst/>
@@ -3182,7 +3162,7 @@
               <a:buNone/>
             </a:pPr>
             <a:r>
-              <a:rPr lang="en-US" sz="1400" dirty="0">
+              <a:rPr lang="en-US" sz="1600" dirty="0">
                 <a:solidFill>
                   <a:srgbClr val="14213D"/>
                 </a:solidFill>
@@ -3190,9 +3170,9 @@
                 <a:ea typeface="Arial" pitchFamily="34" charset="-122"/>
                 <a:cs typeface="Arial" pitchFamily="34" charset="-120"/>
               </a:rPr>
-              <a:t>Your conversations are not used to train the model</a:t>
-            </a:r>
-            <a:endParaRPr lang="en-US" sz="1400" dirty="0"/>
+              <a:t>Conversations not used for training</a:t>
+            </a:r>
+            <a:endParaRPr lang="en-US" sz="1600" dirty="0"/>
           </a:p>
         </p:txBody>
       </p:sp>
@@ -3204,8 +3184,8 @@
         </p:nvSpPr>
         <p:spPr>
           <a:xfrm>
-            <a:off x="7351776" y="2286000"/>
-            <a:ext cx="1947672" cy="475488"/>
+            <a:off x="7808976" y="2432304"/>
+            <a:ext cx="1719072" cy="420624"/>
           </a:xfrm>
           <a:prstGeom prst="rect">
             <a:avLst/>
@@ -3221,7 +3201,7 @@
               <a:buNone/>
             </a:pPr>
             <a:r>
-              <a:rPr lang="en-US" sz="950" b="1" spc="120" kern="0" dirty="0">
+              <a:rPr lang="en-US" sz="1600" b="1" spc="80" kern="0" dirty="0">
                 <a:solidFill>
                   <a:srgbClr val="5A6379"/>
                 </a:solidFill>
@@ -3231,7 +3211,7 @@
               </a:rPr>
               <a:t>OPTIONAL</a:t>
             </a:r>
-            <a:endParaRPr lang="en-US" sz="950" dirty="0"/>
+            <a:endParaRPr lang="en-US" sz="1600" dirty="0"/>
           </a:p>
         </p:txBody>
       </p:sp>
@@ -3243,8 +3223,8 @@
         </p:nvSpPr>
         <p:spPr>
           <a:xfrm>
-            <a:off x="9390888" y="2286000"/>
-            <a:ext cx="1947672" cy="475488"/>
+            <a:off x="9619488" y="2432304"/>
+            <a:ext cx="1719072" cy="420624"/>
           </a:xfrm>
           <a:prstGeom prst="rect">
             <a:avLst/>
@@ -3282,7 +3262,7 @@
         </p:nvSpPr>
         <p:spPr>
           <a:xfrm rot="2700000">
-            <a:off x="832104" y="2948940"/>
+            <a:off x="832104" y="3012948"/>
             <a:ext cx="100584" cy="100584"/>
           </a:xfrm>
           <a:prstGeom prst="rect">
@@ -3307,8 +3287,8 @@
         </p:nvSpPr>
         <p:spPr>
           <a:xfrm>
-            <a:off x="1124712" y="2761488"/>
-            <a:ext cx="5998464" cy="475488"/>
+            <a:off x="1124712" y="2852928"/>
+            <a:ext cx="6455664" cy="420624"/>
           </a:xfrm>
           <a:prstGeom prst="rect">
             <a:avLst/>
@@ -3327,7 +3307,7 @@
               <a:buNone/>
             </a:pPr>
             <a:r>
-              <a:rPr lang="en-US" sz="1400" dirty="0">
+              <a:rPr lang="en-US" sz="1600" dirty="0">
                 <a:solidFill>
                   <a:srgbClr val="14213D"/>
                 </a:solidFill>
@@ -3335,9 +3315,9 @@
                 <a:ea typeface="Arial" pitchFamily="34" charset="-122"/>
                 <a:cs typeface="Arial" pitchFamily="34" charset="-120"/>
               </a:rPr>
-              <a:t>GDPR-aligned data processing agreement (EU standard clauses)</a:t>
-            </a:r>
-            <a:endParaRPr lang="en-US" sz="1400" dirty="0"/>
+              <a:t>GDPR data processing agreement</a:t>
+            </a:r>
+            <a:endParaRPr lang="en-US" sz="1600" dirty="0"/>
           </a:p>
         </p:txBody>
       </p:sp>
@@ -3349,8 +3329,8 @@
         </p:nvSpPr>
         <p:spPr>
           <a:xfrm>
-            <a:off x="7351776" y="2761488"/>
-            <a:ext cx="1947672" cy="475488"/>
+            <a:off x="7808976" y="2852928"/>
+            <a:ext cx="1719072" cy="420624"/>
           </a:xfrm>
           <a:prstGeom prst="rect">
             <a:avLst/>
@@ -3366,7 +3346,7 @@
               <a:buNone/>
             </a:pPr>
             <a:r>
-              <a:rPr lang="en-US" sz="1500" b="1" dirty="0">
+              <a:rPr lang="en-US" sz="1800" b="1" dirty="0">
                 <a:solidFill>
                   <a:srgbClr val="5A6379"/>
                 </a:solidFill>
@@ -3376,7 +3356,7 @@
               </a:rPr>
               <a:t>✕</a:t>
             </a:r>
-            <a:endParaRPr lang="en-US" sz="1500" dirty="0"/>
+            <a:endParaRPr lang="en-US" sz="1800" dirty="0"/>
           </a:p>
         </p:txBody>
       </p:sp>
@@ -3388,8 +3368,8 @@
         </p:nvSpPr>
         <p:spPr>
           <a:xfrm>
-            <a:off x="9390888" y="2761488"/>
-            <a:ext cx="1947672" cy="475488"/>
+            <a:off x="9619488" y="2852928"/>
+            <a:ext cx="1719072" cy="420624"/>
           </a:xfrm>
           <a:prstGeom prst="rect">
             <a:avLst/>
@@ -3427,8 +3407,8 @@
         </p:nvSpPr>
         <p:spPr>
           <a:xfrm>
-            <a:off x="704088" y="3236976"/>
-            <a:ext cx="6528816" cy="475488"/>
+            <a:off x="704088" y="3273552"/>
+            <a:ext cx="6986016" cy="420624"/>
           </a:xfrm>
           <a:prstGeom prst="rect">
             <a:avLst/>
@@ -3447,7 +3427,7 @@
         </p:nvSpPr>
         <p:spPr>
           <a:xfrm rot="2700000">
-            <a:off x="832104" y="3424428"/>
+            <a:off x="832104" y="3433572"/>
             <a:ext cx="100584" cy="100584"/>
           </a:xfrm>
           <a:prstGeom prst="rect">
@@ -3472,8 +3452,8 @@
         </p:nvSpPr>
         <p:spPr>
           <a:xfrm>
-            <a:off x="1124712" y="3236976"/>
-            <a:ext cx="5998464" cy="475488"/>
+            <a:off x="1124712" y="3273552"/>
+            <a:ext cx="6455664" cy="420624"/>
           </a:xfrm>
           <a:prstGeom prst="rect">
             <a:avLst/>
@@ -3492,7 +3472,7 @@
               <a:buNone/>
             </a:pPr>
             <a:r>
-              <a:rPr lang="en-US" sz="1400" dirty="0">
+              <a:rPr lang="en-US" sz="1600" dirty="0">
                 <a:solidFill>
                   <a:srgbClr val="14213D"/>
                 </a:solidFill>
@@ -3502,7 +3482,7 @@
               </a:rPr>
               <a:t>Single sign-on and domain capture</a:t>
             </a:r>
-            <a:endParaRPr lang="en-US" sz="1400" dirty="0"/>
+            <a:endParaRPr lang="en-US" sz="1600" dirty="0"/>
           </a:p>
         </p:txBody>
       </p:sp>
@@ -3514,8 +3494,8 @@
         </p:nvSpPr>
         <p:spPr>
           <a:xfrm>
-            <a:off x="7351776" y="3236976"/>
-            <a:ext cx="1947672" cy="475488"/>
+            <a:off x="7808976" y="3273552"/>
+            <a:ext cx="1719072" cy="420624"/>
           </a:xfrm>
           <a:prstGeom prst="rect">
             <a:avLst/>
@@ -3531,7 +3511,7 @@
               <a:buNone/>
             </a:pPr>
             <a:r>
-              <a:rPr lang="en-US" sz="1500" b="1" dirty="0">
+              <a:rPr lang="en-US" sz="1800" b="1" dirty="0">
                 <a:solidFill>
                   <a:srgbClr val="5A6379"/>
                 </a:solidFill>
@@ -3541,7 +3521,7 @@
               </a:rPr>
               <a:t>✕</a:t>
             </a:r>
-            <a:endParaRPr lang="en-US" sz="1500" dirty="0"/>
+            <a:endParaRPr lang="en-US" sz="1800" dirty="0"/>
           </a:p>
         </p:txBody>
       </p:sp>
@@ -3553,8 +3533,8 @@
         </p:nvSpPr>
         <p:spPr>
           <a:xfrm>
-            <a:off x="9390888" y="3236976"/>
-            <a:ext cx="1947672" cy="475488"/>
+            <a:off x="9619488" y="3273552"/>
+            <a:ext cx="1719072" cy="420624"/>
           </a:xfrm>
           <a:prstGeom prst="rect">
             <a:avLst/>
@@ -3592,7 +3572,7 @@
         </p:nvSpPr>
         <p:spPr>
           <a:xfrm rot="2700000">
-            <a:off x="832104" y="3899916"/>
+            <a:off x="832104" y="3854196"/>
             <a:ext cx="100584" cy="100584"/>
           </a:xfrm>
           <a:prstGeom prst="rect">
@@ -3617,8 +3597,8 @@
         </p:nvSpPr>
         <p:spPr>
           <a:xfrm>
-            <a:off x="1124712" y="3712464"/>
-            <a:ext cx="5998464" cy="475488"/>
+            <a:off x="1124712" y="3694176"/>
+            <a:ext cx="6455664" cy="420624"/>
           </a:xfrm>
           <a:prstGeom prst="rect">
             <a:avLst/>
@@ -3637,7 +3617,7 @@
               <a:buNone/>
             </a:pPr>
             <a:r>
-              <a:rPr lang="en-US" sz="1400" dirty="0">
+              <a:rPr lang="en-US" sz="1600" dirty="0">
                 <a:solidFill>
                   <a:srgbClr val="14213D"/>
                 </a:solidFill>
@@ -3647,7 +3627,7 @@
               </a:rPr>
               <a:t>Audit logs with 180-day export</a:t>
             </a:r>
-            <a:endParaRPr lang="en-US" sz="1400" dirty="0"/>
+            <a:endParaRPr lang="en-US" sz="1600" dirty="0"/>
           </a:p>
         </p:txBody>
       </p:sp>
@@ -3659,8 +3639,8 @@
         </p:nvSpPr>
         <p:spPr>
           <a:xfrm>
-            <a:off x="7351776" y="3712464"/>
-            <a:ext cx="1947672" cy="475488"/>
+            <a:off x="7808976" y="3694176"/>
+            <a:ext cx="1719072" cy="420624"/>
           </a:xfrm>
           <a:prstGeom prst="rect">
             <a:avLst/>
@@ -3676,7 +3656,7 @@
               <a:buNone/>
             </a:pPr>
             <a:r>
-              <a:rPr lang="en-US" sz="1500" b="1" dirty="0">
+              <a:rPr lang="en-US" sz="1800" b="1" dirty="0">
                 <a:solidFill>
                   <a:srgbClr val="5A6379"/>
                 </a:solidFill>
@@ -3686,7 +3666,7 @@
               </a:rPr>
               <a:t>✕</a:t>
             </a:r>
-            <a:endParaRPr lang="en-US" sz="1500" dirty="0"/>
+            <a:endParaRPr lang="en-US" sz="1800" dirty="0"/>
           </a:p>
         </p:txBody>
       </p:sp>
@@ -3698,8 +3678,8 @@
         </p:nvSpPr>
         <p:spPr>
           <a:xfrm>
-            <a:off x="9390888" y="3712464"/>
-            <a:ext cx="1947672" cy="475488"/>
+            <a:off x="9619488" y="3694176"/>
+            <a:ext cx="1719072" cy="420624"/>
           </a:xfrm>
           <a:prstGeom prst="rect">
             <a:avLst/>
@@ -3737,8 +3717,8 @@
         </p:nvSpPr>
         <p:spPr>
           <a:xfrm>
-            <a:off x="704088" y="4187952"/>
-            <a:ext cx="6528816" cy="475488"/>
+            <a:off x="704088" y="4114800"/>
+            <a:ext cx="6986016" cy="420624"/>
           </a:xfrm>
           <a:prstGeom prst="rect">
             <a:avLst/>
@@ -3757,7 +3737,7 @@
         </p:nvSpPr>
         <p:spPr>
           <a:xfrm rot="2700000">
-            <a:off x="832104" y="4375404"/>
+            <a:off x="832104" y="4274820"/>
             <a:ext cx="100584" cy="100584"/>
           </a:xfrm>
           <a:prstGeom prst="rect">
@@ -3782,8 +3762,8 @@
         </p:nvSpPr>
         <p:spPr>
           <a:xfrm>
-            <a:off x="1124712" y="4187952"/>
-            <a:ext cx="5998464" cy="475488"/>
+            <a:off x="1124712" y="4114800"/>
+            <a:ext cx="6455664" cy="420624"/>
           </a:xfrm>
           <a:prstGeom prst="rect">
             <a:avLst/>
@@ -3802,7 +3782,7 @@
               <a:buNone/>
             </a:pPr>
             <a:r>
-              <a:rPr lang="en-US" sz="1400" dirty="0">
+              <a:rPr lang="en-US" sz="1600" dirty="0">
                 <a:solidFill>
                   <a:srgbClr val="14213D"/>
                 </a:solidFill>
@@ -3812,7 +3792,7 @@
               </a:rPr>
               <a:t>Custom data retention controls</a:t>
             </a:r>
-            <a:endParaRPr lang="en-US" sz="1400" dirty="0"/>
+            <a:endParaRPr lang="en-US" sz="1600" dirty="0"/>
           </a:p>
         </p:txBody>
       </p:sp>
@@ -3824,8 +3804,8 @@
         </p:nvSpPr>
         <p:spPr>
           <a:xfrm>
-            <a:off x="7351776" y="4187952"/>
-            <a:ext cx="1947672" cy="475488"/>
+            <a:off x="7808976" y="4114800"/>
+            <a:ext cx="1719072" cy="420624"/>
           </a:xfrm>
           <a:prstGeom prst="rect">
             <a:avLst/>
@@ -3841,7 +3821,7 @@
               <a:buNone/>
             </a:pPr>
             <a:r>
-              <a:rPr lang="en-US" sz="1500" b="1" dirty="0">
+              <a:rPr lang="en-US" sz="1800" b="1" dirty="0">
                 <a:solidFill>
                   <a:srgbClr val="5A6379"/>
                 </a:solidFill>
@@ -3851,7 +3831,7 @@
               </a:rPr>
               <a:t>✕</a:t>
             </a:r>
-            <a:endParaRPr lang="en-US" sz="1500" dirty="0"/>
+            <a:endParaRPr lang="en-US" sz="1800" dirty="0"/>
           </a:p>
         </p:txBody>
       </p:sp>
@@ -3863,8 +3843,8 @@
         </p:nvSpPr>
         <p:spPr>
           <a:xfrm>
-            <a:off x="9390888" y="4187952"/>
-            <a:ext cx="1947672" cy="475488"/>
+            <a:off x="9619488" y="4114800"/>
+            <a:ext cx="1719072" cy="420624"/>
           </a:xfrm>
           <a:prstGeom prst="rect">
             <a:avLst/>
@@ -3902,7 +3882,7 @@
         </p:nvSpPr>
         <p:spPr>
           <a:xfrm rot="2700000">
-            <a:off x="832104" y="4850892"/>
+            <a:off x="832104" y="4695444"/>
             <a:ext cx="100584" cy="100584"/>
           </a:xfrm>
           <a:prstGeom prst="rect">
@@ -3927,8 +3907,8 @@
         </p:nvSpPr>
         <p:spPr>
           <a:xfrm>
-            <a:off x="1124712" y="4663440"/>
-            <a:ext cx="5998464" cy="475488"/>
+            <a:off x="1124712" y="4535424"/>
+            <a:ext cx="6455664" cy="420624"/>
           </a:xfrm>
           <a:prstGeom prst="rect">
             <a:avLst/>
@@ -3947,7 +3927,7 @@
               <a:buNone/>
             </a:pPr>
             <a:r>
-              <a:rPr lang="en-US" sz="1400" dirty="0">
+              <a:rPr lang="en-US" sz="1600" dirty="0">
                 <a:solidFill>
                   <a:srgbClr val="14213D"/>
                 </a:solidFill>
@@ -3955,9 +3935,9 @@
                 <a:ea typeface="Arial" pitchFamily="34" charset="-122"/>
                 <a:cs typeface="Arial" pitchFamily="34" charset="-120"/>
               </a:rPr>
-              <a:t>Role-based permissions and a compliance API</a:t>
-            </a:r>
-            <a:endParaRPr lang="en-US" sz="1400" dirty="0"/>
+              <a:t>Role-based permissions, compliance API</a:t>
+            </a:r>
+            <a:endParaRPr lang="en-US" sz="1600" dirty="0"/>
           </a:p>
         </p:txBody>
       </p:sp>
@@ -3969,8 +3949,8 @@
         </p:nvSpPr>
         <p:spPr>
           <a:xfrm>
-            <a:off x="7351776" y="4663440"/>
-            <a:ext cx="1947672" cy="475488"/>
+            <a:off x="7808976" y="4535424"/>
+            <a:ext cx="1719072" cy="420624"/>
           </a:xfrm>
           <a:prstGeom prst="rect">
             <a:avLst/>
@@ -3986,7 +3966,7 @@
               <a:buNone/>
             </a:pPr>
             <a:r>
-              <a:rPr lang="en-US" sz="1500" b="1" dirty="0">
+              <a:rPr lang="en-US" sz="1800" b="1" dirty="0">
                 <a:solidFill>
                   <a:srgbClr val="5A6379"/>
                 </a:solidFill>
@@ -3996,7 +3976,7 @@
               </a:rPr>
               <a:t>✕</a:t>
             </a:r>
-            <a:endParaRPr lang="en-US" sz="1500" dirty="0"/>
+            <a:endParaRPr lang="en-US" sz="1800" dirty="0"/>
           </a:p>
         </p:txBody>
       </p:sp>
@@ -4008,8 +3988,8 @@
         </p:nvSpPr>
         <p:spPr>
           <a:xfrm>
-            <a:off x="9390888" y="4663440"/>
-            <a:ext cx="1947672" cy="475488"/>
+            <a:off x="9619488" y="4535424"/>
+            <a:ext cx="1719072" cy="420624"/>
           </a:xfrm>
           <a:prstGeom prst="rect">
             <a:avLst/>
@@ -4047,8 +4027,8 @@
         </p:nvSpPr>
         <p:spPr>
           <a:xfrm>
-            <a:off x="813816" y="5248656"/>
-            <a:ext cx="10570464" cy="299466"/>
+            <a:off x="813816" y="5065776"/>
+            <a:ext cx="10570464" cy="347472"/>
           </a:xfrm>
           <a:prstGeom prst="rect">
             <a:avLst/>
@@ -4067,7 +4047,7 @@
               <a:buNone/>
             </a:pPr>
             <a:r>
-              <a:rPr lang="en-US" sz="1300" b="1" dirty="0">
+              <a:rPr lang="en-US" sz="1600" b="1" dirty="0">
                 <a:solidFill>
                   <a:srgbClr val="8A6D14"/>
                 </a:solidFill>
@@ -4075,48 +4055,9 @@
                 <a:ea typeface="Arial" pitchFamily="34" charset="-122"/>
                 <a:cs typeface="Arial" pitchFamily="34" charset="-120"/>
               </a:rPr>
-              <a:t>Claude for Work is SOC 2 Type II and ISO 27001 certified. Every plan encrypts your data in transit and at rest.</a:t>
-            </a:r>
-            <a:endParaRPr lang="en-US" sz="1300" dirty="0"/>
-          </a:p>
-        </p:txBody>
-      </p:sp>
-      <p:sp>
-        <p:nvSpPr>
-          <p:cNvPr id="40" name="Text 38"/>
-          <p:cNvSpPr/>
-          <p:nvPr/>
-        </p:nvSpPr>
-        <p:spPr>
-          <a:xfrm>
-            <a:off x="813816" y="5559552"/>
-            <a:ext cx="10570464" cy="164592"/>
-          </a:xfrm>
-          <a:prstGeom prst="rect">
-            <a:avLst/>
-          </a:prstGeom>
-          <a:noFill/>
-          <a:ln/>
-        </p:spPr>
-        <p:txBody>
-          <a:bodyPr wrap="square" lIns="0" tIns="0" rIns="0" bIns="0" rtlCol="0" anchor="ctr"/>
-          <a:lstStyle/>
-          <a:p>
-            <a:pPr algn="l" indent="0" marL="0">
-              <a:buNone/>
-            </a:pPr>
-            <a:r>
-              <a:rPr lang="en-US" sz="900" i="1" dirty="0">
-                <a:solidFill>
-                  <a:srgbClr val="5A6379"/>
-                </a:solidFill>
-                <a:latin typeface="Arial" pitchFamily="34" charset="0"/>
-                <a:ea typeface="Arial" pitchFamily="34" charset="-122"/>
-                <a:cs typeface="Arial" pitchFamily="34" charset="-120"/>
-              </a:rPr>
-              <a:t>SSO is Team and up. Audit logs, retention, role permissions and the DPA are Enterprise. Pro and Max set training exclusion in privacy settings. Source: privacy.claude.com.</a:t>
-            </a:r>
-            <a:endParaRPr lang="en-US" sz="900" dirty="0"/>
+              <a:t>SOC 2 Type II and ISO 27001 certified. Every plan encrypts data in transit and at rest.</a:t>
+            </a:r>
+            <a:endParaRPr lang="en-US" sz="1600" dirty="0"/>
           </a:p>
         </p:txBody>
       </p:sp>
